--- a/deck/NIBM_Essex_MSc_Cyber_Business_Case_v2_Appendix.pptx
+++ b/deck/NIBM_Essex_MSc_Cyber_Business_Case_v2_Appendix.pptx
@@ -8136,7 +8136,7 @@
                 <a:ea typeface="Open Sans" pitchFamily="34" charset="-122"/>
                 <a:cs typeface="Open Sans" pitchFamily="34" charset="-120"/>
               </a:rPr>
-              <a:t>Microsoft Forms, 6 items, anonymous; open link circulated within NIBM, 22 to 24 Sep 2026</a:t>
+              <a:t>Microsoft Forms, 6 items, anonymous; open link circulated within NIBM, 22 to 23 Sep 2026</a:t>
             </a:r>
             <a:endParaRPr lang="en-US" sz="1100" dirty="0"/>
           </a:p>
